--- a/examples/ppt/charts/charts-advanced.pptx
+++ b/examples/ppt/charts/charts-advanced.pptx
@@ -5,14 +5,14 @@
     <p:sldMasterId xmlns:r="http://schemas.openxmlformats.org/officeDocument/2006/relationships" id="2147483648" r:id="rId1"/>
   </p:sldMasterIdLst>
   <p:sldIdLst>
-    <p:sldId id="256" r:id="R4894ea0693bd422b"/>
-    <p:sldId id="257" r:id="R639c32b3805b4984"/>
-    <p:sldId id="258" r:id="Rfbe78e9c4cee4ebb"/>
-    <p:sldId id="259" r:id="R66cfce272f9d4ff4"/>
-    <p:sldId id="260" r:id="R8c1495d8797246ca"/>
-    <p:sldId id="261" r:id="R8100022df80345de"/>
-    <p:sldId id="262" r:id="R1b7c85ba85204018"/>
-    <p:sldId id="263" r:id="R379187b47d1a443a"/>
+    <p:sldId id="256" r:id="R132f95eb671244e0"/>
+    <p:sldId id="257" r:id="R949aefdf526844cc"/>
+    <p:sldId id="258" r:id="R79579a8fc80a4f42"/>
+    <p:sldId id="259" r:id="R3d18ec67f4954338"/>
+    <p:sldId id="260" r:id="Rb9f84e6ac63f4bd4"/>
+    <p:sldId id="261" r:id="Rbc15e950dd2c45b2"/>
+    <p:sldId id="262" r:id="R8abff4f9aaae45f8"/>
+    <p:sldId id="263" r:id="Ra6c398f4c3a340d9"/>
   </p:sldIdLst>
   <p:sldSz cx="12192000" cy="6858000"/>
   <p:notesSz cx="6858000" cy="9144000"/>
@@ -287,7 +287,7 @@
 </file>
 
 <file path=ppt/slideMasters/slideMaster1.xml><?xml version="1.0" encoding="utf-8"?>
-<p:sldMaster xmlns:p="http://schemas.openxmlformats.org/presentationml/2006/main">
+<p:sldMaster xmlns:r="http://schemas.openxmlformats.org/officeDocument/2006/relationships" xmlns:p="http://schemas.openxmlformats.org/presentationml/2006/main">
   <p:cSld>
     <p:spTree>
       <p:nvGrpSpPr>
@@ -1334,9 +1334,11 @@
             <c:v>A</c:v>
           </c:tx>
           <c:spPr>
-            <a:solidFill xmlns:a="http://schemas.openxmlformats.org/drawingml/2006/main">
-              <a:srgbClr val="4472C4"/>
-            </a:solidFill>
+            <a:ln xmlns:a="http://schemas.openxmlformats.org/drawingml/2006/main" w="25400">
+              <a:solidFill>
+                <a:srgbClr val="4472C4"/>
+              </a:solidFill>
+            </a:ln>
           </c:spPr>
           <c:marker>
             <c:size val="12"/>
@@ -2389,9 +2391,11 @@
             <c:v>A</c:v>
           </c:tx>
           <c:spPr>
-            <a:solidFill xmlns:a="http://schemas.openxmlformats.org/drawingml/2006/main">
-              <a:srgbClr val="4472C4"/>
-            </a:solidFill>
+            <a:ln xmlns:a="http://schemas.openxmlformats.org/drawingml/2006/main" w="25400">
+              <a:solidFill>
+                <a:srgbClr val="4472C4"/>
+              </a:solidFill>
+            </a:ln>
           </c:spPr>
           <c:cat>
             <c:strLit>
@@ -2825,9 +2829,11 @@
             <c:v>A</c:v>
           </c:tx>
           <c:spPr>
-            <a:solidFill xmlns:a="http://schemas.openxmlformats.org/drawingml/2006/main">
-              <a:srgbClr val="4472C4"/>
-            </a:solidFill>
+            <a:ln xmlns:a="http://schemas.openxmlformats.org/drawingml/2006/main" w="25400">
+              <a:solidFill>
+                <a:srgbClr val="4472C4"/>
+              </a:solidFill>
+            </a:ln>
           </c:spPr>
           <c:cat>
             <c:strLit>
@@ -2865,7 +2871,6 @@
             </c:numLit>
           </c:val>
         </c:ser>
-        <c:marker val="1"/>
         <c:axId val="1"/>
         <c:axId val="2"/>
       </c:lineChart>
@@ -4283,8 +4288,8 @@
       <p:grpSpPr/>
       <p:sp>
         <p:nvSpPr>
-          <p:cNvPr id="10000" name="TextBox 1"/>
-          <p:cNvSpPr/>
+          <p:cNvPr id="100000" name="TextBox 1"/>
+          <p:cNvSpPr txBox="1"/>
           <p:nvPr/>
         </p:nvSpPr>
         <p:spPr>
@@ -4311,7 +4316,7 @@
       </p:sp>
       <p:graphicFrame>
         <p:nvGraphicFramePr>
-          <p:cNvPr id="10001" name="default (LTR)"/>
+          <p:cNvPr id="100001" name="default (LTR)"/>
           <p:cNvGraphicFramePr/>
           <p:nvPr/>
         </p:nvGraphicFramePr>
@@ -4321,13 +4326,13 @@
         </p:xfrm>
         <a:graphic xmlns:a="http://schemas.openxmlformats.org/drawingml/2006/main">
           <a:graphicData uri="http://schemas.openxmlformats.org/drawingml/2006/chart">
-            <c:chart xmlns:r="http://schemas.openxmlformats.org/officeDocument/2006/relationships" xmlns:c="http://schemas.openxmlformats.org/drawingml/2006/chart" r:id="Rdc1c5a99e9f44617"/>
+            <c:chart xmlns:r="http://schemas.openxmlformats.org/officeDocument/2006/relationships" xmlns:c="http://schemas.openxmlformats.org/drawingml/2006/chart" r:id="R8e3a14cbe9a1470c"/>
           </a:graphicData>
         </a:graphic>
       </p:graphicFrame>
       <p:graphicFrame>
         <p:nvGraphicFramePr>
-          <p:cNvPr id="10002" name="direction=rtl (Set after Add)"/>
+          <p:cNvPr id="100002" name="direction=rtl (Set after Add)"/>
           <p:cNvGraphicFramePr/>
           <p:nvPr/>
         </p:nvGraphicFramePr>
@@ -4337,13 +4342,13 @@
         </p:xfrm>
         <a:graphic xmlns:a="http://schemas.openxmlformats.org/drawingml/2006/main">
           <a:graphicData uri="http://schemas.openxmlformats.org/drawingml/2006/chart">
-            <c:chart xmlns:r="http://schemas.openxmlformats.org/officeDocument/2006/relationships" xmlns:c="http://schemas.openxmlformats.org/drawingml/2006/chart" r:id="Rb78bc8562930492b"/>
+            <c:chart xmlns:r="http://schemas.openxmlformats.org/officeDocument/2006/relationships" xmlns:c="http://schemas.openxmlformats.org/drawingml/2006/chart" r:id="Re71c12f32987450b"/>
           </a:graphicData>
         </a:graphic>
       </p:graphicFrame>
       <p:graphicFrame>
         <p:nvGraphicFramePr>
-          <p:cNvPr id="10003" name="anchor=0.3cm,11cm,15.5cm,7cm"/>
+          <p:cNvPr id="100003" name="anchor=0.3cm,11cm,15.5cm,7cm"/>
           <p:cNvGraphicFramePr/>
           <p:nvPr/>
         </p:nvGraphicFramePr>
@@ -4353,7 +4358,7 @@
         </p:xfrm>
         <a:graphic xmlns:a="http://schemas.openxmlformats.org/drawingml/2006/main">
           <a:graphicData uri="http://schemas.openxmlformats.org/drawingml/2006/chart">
-            <c:chart xmlns:r="http://schemas.openxmlformats.org/officeDocument/2006/relationships" xmlns:c="http://schemas.openxmlformats.org/drawingml/2006/chart" r:id="R19db32df44f04061"/>
+            <c:chart xmlns:r="http://schemas.openxmlformats.org/officeDocument/2006/relationships" xmlns:c="http://schemas.openxmlformats.org/drawingml/2006/chart" r:id="R6ca1d94036aa4344"/>
           </a:graphicData>
         </a:graphic>
       </p:graphicFrame>
@@ -4374,8 +4379,8 @@
       <p:grpSpPr/>
       <p:sp>
         <p:nvSpPr>
-          <p:cNvPr id="10004" name="TextBox 1"/>
-          <p:cNvSpPr/>
+          <p:cNvPr id="100004" name="TextBox 1"/>
+          <p:cNvSpPr txBox="1"/>
           <p:nvPr/>
         </p:nvSpPr>
         <p:spPr>
@@ -4402,7 +4407,7 @@
       </p:sp>
       <p:graphicFrame>
         <p:nvGraphicFramePr>
-          <p:cNvPr id="10005" name="axisvisible=false (both axes hidden)"/>
+          <p:cNvPr id="100005" name="axisvisible=false (both axes hidden)"/>
           <p:cNvGraphicFramePr/>
           <p:nvPr/>
         </p:nvGraphicFramePr>
@@ -4412,13 +4417,13 @@
         </p:xfrm>
         <a:graphic xmlns:a="http://schemas.openxmlformats.org/drawingml/2006/main">
           <a:graphicData uri="http://schemas.openxmlformats.org/drawingml/2006/chart">
-            <c:chart xmlns:r="http://schemas.openxmlformats.org/officeDocument/2006/relationships" xmlns:c="http://schemas.openxmlformats.org/drawingml/2006/chart" r:id="R3b8dde5a6a8b443d"/>
+            <c:chart xmlns:r="http://schemas.openxmlformats.org/officeDocument/2006/relationships" xmlns:c="http://schemas.openxmlformats.org/drawingml/2006/chart" r:id="R4b6f5c6601a24ac6"/>
           </a:graphicData>
         </a:graphic>
       </p:graphicFrame>
       <p:graphicFrame>
         <p:nvGraphicFramePr>
-          <p:cNvPr id="10006" name="valaxisvisible=false (Y hidden, X shown)"/>
+          <p:cNvPr id="100006" name="valaxisvisible=false (Y hidden, X shown)"/>
           <p:cNvGraphicFramePr/>
           <p:nvPr/>
         </p:nvGraphicFramePr>
@@ -4428,13 +4433,13 @@
         </p:xfrm>
         <a:graphic xmlns:a="http://schemas.openxmlformats.org/drawingml/2006/main">
           <a:graphicData uri="http://schemas.openxmlformats.org/drawingml/2006/chart">
-            <c:chart xmlns:r="http://schemas.openxmlformats.org/officeDocument/2006/relationships" xmlns:c="http://schemas.openxmlformats.org/drawingml/2006/chart" r:id="R4cd4d2be095f4235"/>
+            <c:chart xmlns:r="http://schemas.openxmlformats.org/officeDocument/2006/relationships" xmlns:c="http://schemas.openxmlformats.org/drawingml/2006/chart" r:id="R5ce1c6e88cc14ae9"/>
           </a:graphicData>
         </a:graphic>
       </p:graphicFrame>
       <p:graphicFrame>
         <p:nvGraphicFramePr>
-          <p:cNvPr id="10007" name="catAxisVisible=false (X hidden)"/>
+          <p:cNvPr id="100007" name="catAxisVisible=false (X hidden)"/>
           <p:cNvGraphicFramePr/>
           <p:nvPr/>
         </p:nvGraphicFramePr>
@@ -4444,13 +4449,13 @@
         </p:xfrm>
         <a:graphic xmlns:a="http://schemas.openxmlformats.org/drawingml/2006/main">
           <a:graphicData uri="http://schemas.openxmlformats.org/drawingml/2006/chart">
-            <c:chart xmlns:r="http://schemas.openxmlformats.org/officeDocument/2006/relationships" xmlns:c="http://schemas.openxmlformats.org/drawingml/2006/chart" r:id="Rd6309c8142054431"/>
+            <c:chart xmlns:r="http://schemas.openxmlformats.org/officeDocument/2006/relationships" xmlns:c="http://schemas.openxmlformats.org/drawingml/2006/chart" r:id="R8a8402f3d69e418c"/>
           </a:graphicData>
         </a:graphic>
       </p:graphicFrame>
       <p:graphicFrame>
         <p:nvGraphicFramePr>
-          <p:cNvPr id="10008" name="axisorientation=true (reversed) + axisposition=top"/>
+          <p:cNvPr id="100008" name="axisorientation=true (reversed) + axisposition=top"/>
           <p:cNvGraphicFramePr/>
           <p:nvPr/>
         </p:nvGraphicFramePr>
@@ -4460,7 +4465,7 @@
         </p:xfrm>
         <a:graphic xmlns:a="http://schemas.openxmlformats.org/drawingml/2006/main">
           <a:graphicData uri="http://schemas.openxmlformats.org/drawingml/2006/chart">
-            <c:chart xmlns:r="http://schemas.openxmlformats.org/officeDocument/2006/relationships" xmlns:c="http://schemas.openxmlformats.org/drawingml/2006/chart" r:id="R2cedffca5a044f36"/>
+            <c:chart xmlns:r="http://schemas.openxmlformats.org/officeDocument/2006/relationships" xmlns:c="http://schemas.openxmlformats.org/drawingml/2006/chart" r:id="R48f9cd00b9ae46e7"/>
           </a:graphicData>
         </a:graphic>
       </p:graphicFrame>
@@ -4481,8 +4486,8 @@
       <p:grpSpPr/>
       <p:sp>
         <p:nvSpPr>
-          <p:cNvPr id="10009" name="TextBox 1"/>
-          <p:cNvSpPr/>
+          <p:cNvPr id="100009" name="TextBox 1"/>
+          <p:cNvSpPr txBox="1"/>
           <p:nvPr/>
         </p:nvSpPr>
         <p:spPr>
@@ -4509,7 +4514,7 @@
       </p:sp>
       <p:graphicFrame>
         <p:nvGraphicFramePr>
-          <p:cNvPr id="10010" name="crossBetween=between (default)"/>
+          <p:cNvPr id="100010" name="crossBetween=between (default)"/>
           <p:cNvGraphicFramePr/>
           <p:nvPr/>
         </p:nvGraphicFramePr>
@@ -4519,13 +4524,13 @@
         </p:xfrm>
         <a:graphic xmlns:a="http://schemas.openxmlformats.org/drawingml/2006/main">
           <a:graphicData uri="http://schemas.openxmlformats.org/drawingml/2006/chart">
-            <c:chart xmlns:r="http://schemas.openxmlformats.org/officeDocument/2006/relationships" xmlns:c="http://schemas.openxmlformats.org/drawingml/2006/chart" r:id="R2eaad2a4a1f444ec"/>
+            <c:chart xmlns:r="http://schemas.openxmlformats.org/officeDocument/2006/relationships" xmlns:c="http://schemas.openxmlformats.org/drawingml/2006/chart" r:id="R9d8f33bb8c5048b5"/>
           </a:graphicData>
         </a:graphic>
       </p:graphicFrame>
       <p:graphicFrame>
         <p:nvGraphicFramePr>
-          <p:cNvPr id="10011" name="crossBetween=midCat"/>
+          <p:cNvPr id="100011" name="crossBetween=midCat"/>
           <p:cNvGraphicFramePr/>
           <p:nvPr/>
         </p:nvGraphicFramePr>
@@ -4535,13 +4540,13 @@
         </p:xfrm>
         <a:graphic xmlns:a="http://schemas.openxmlformats.org/drawingml/2006/main">
           <a:graphicData uri="http://schemas.openxmlformats.org/drawingml/2006/chart">
-            <c:chart xmlns:r="http://schemas.openxmlformats.org/officeDocument/2006/relationships" xmlns:c="http://schemas.openxmlformats.org/drawingml/2006/chart" r:id="R3ca27b0e38da4cfc"/>
+            <c:chart xmlns:r="http://schemas.openxmlformats.org/officeDocument/2006/relationships" xmlns:c="http://schemas.openxmlformats.org/drawingml/2006/chart" r:id="R137dbd2249fe4925"/>
           </a:graphicData>
         </a:graphic>
       </p:graphicFrame>
       <p:graphicFrame>
         <p:nvGraphicFramePr>
-          <p:cNvPr id="10012" name="crosses=max (Y crosses at top)"/>
+          <p:cNvPr id="100012" name="crosses=max (Y crosses at top)"/>
           <p:cNvGraphicFramePr/>
           <p:nvPr/>
         </p:nvGraphicFramePr>
@@ -4551,13 +4556,13 @@
         </p:xfrm>
         <a:graphic xmlns:a="http://schemas.openxmlformats.org/drawingml/2006/main">
           <a:graphicData uri="http://schemas.openxmlformats.org/drawingml/2006/chart">
-            <c:chart xmlns:r="http://schemas.openxmlformats.org/officeDocument/2006/relationships" xmlns:c="http://schemas.openxmlformats.org/drawingml/2006/chart" r:id="Rc0ece48b6f5543df"/>
+            <c:chart xmlns:r="http://schemas.openxmlformats.org/officeDocument/2006/relationships" xmlns:c="http://schemas.openxmlformats.org/drawingml/2006/chart" r:id="R629145305e3246f3"/>
           </a:graphicData>
         </a:graphic>
       </p:graphicFrame>
       <p:graphicFrame>
         <p:nvGraphicFramePr>
-          <p:cNvPr id="10013" name="crossesAt=100 + crosses=autoZero"/>
+          <p:cNvPr id="100013" name="crossesAt=100 + crosses=autoZero"/>
           <p:cNvGraphicFramePr/>
           <p:nvPr/>
         </p:nvGraphicFramePr>
@@ -4567,7 +4572,7 @@
         </p:xfrm>
         <a:graphic xmlns:a="http://schemas.openxmlformats.org/drawingml/2006/main">
           <a:graphicData uri="http://schemas.openxmlformats.org/drawingml/2006/chart">
-            <c:chart xmlns:r="http://schemas.openxmlformats.org/officeDocument/2006/relationships" xmlns:c="http://schemas.openxmlformats.org/drawingml/2006/chart" r:id="R20d4bd7eb9ed4e4c"/>
+            <c:chart xmlns:r="http://schemas.openxmlformats.org/officeDocument/2006/relationships" xmlns:c="http://schemas.openxmlformats.org/drawingml/2006/chart" r:id="R6793abc2866542dc"/>
           </a:graphicData>
         </a:graphic>
       </p:graphicFrame>
@@ -4588,8 +4593,8 @@
       <p:grpSpPr/>
       <p:sp>
         <p:nvSpPr>
-          <p:cNvPr id="10014" name="TextBox 1"/>
-          <p:cNvSpPr/>
+          <p:cNvPr id="100014" name="TextBox 1"/>
+          <p:cNvSpPr txBox="1"/>
           <p:nvPr/>
         </p:nvSpPr>
         <p:spPr>
@@ -4616,7 +4621,7 @@
       </p:sp>
       <p:graphicFrame>
         <p:nvGraphicFramePr>
-          <p:cNvPr id="10015" name="labeloffset=100 (default)"/>
+          <p:cNvPr id="100015" name="labeloffset=100 (default)"/>
           <p:cNvGraphicFramePr/>
           <p:nvPr/>
         </p:nvGraphicFramePr>
@@ -4626,13 +4631,13 @@
         </p:xfrm>
         <a:graphic xmlns:a="http://schemas.openxmlformats.org/drawingml/2006/main">
           <a:graphicData uri="http://schemas.openxmlformats.org/drawingml/2006/chart">
-            <c:chart xmlns:r="http://schemas.openxmlformats.org/officeDocument/2006/relationships" xmlns:c="http://schemas.openxmlformats.org/drawingml/2006/chart" r:id="R4748e9dbf20642b4"/>
+            <c:chart xmlns:r="http://schemas.openxmlformats.org/officeDocument/2006/relationships" xmlns:c="http://schemas.openxmlformats.org/drawingml/2006/chart" r:id="R110146a4aa284395"/>
           </a:graphicData>
         </a:graphic>
       </p:graphicFrame>
       <p:graphicFrame>
         <p:nvGraphicFramePr>
-          <p:cNvPr id="10016" name="labeloffset=300 (push labels down)"/>
+          <p:cNvPr id="100016" name="labeloffset=300 (push labels down)"/>
           <p:cNvGraphicFramePr/>
           <p:nvPr/>
         </p:nvGraphicFramePr>
@@ -4642,13 +4647,13 @@
         </p:xfrm>
         <a:graphic xmlns:a="http://schemas.openxmlformats.org/drawingml/2006/main">
           <a:graphicData uri="http://schemas.openxmlformats.org/drawingml/2006/chart">
-            <c:chart xmlns:r="http://schemas.openxmlformats.org/officeDocument/2006/relationships" xmlns:c="http://schemas.openxmlformats.org/drawingml/2006/chart" r:id="Rc55d3cfdf71c4bfa"/>
+            <c:chart xmlns:r="http://schemas.openxmlformats.org/officeDocument/2006/relationships" xmlns:c="http://schemas.openxmlformats.org/drawingml/2006/chart" r:id="Rfd42ccbc5ef6464a"/>
           </a:graphicData>
         </a:graphic>
       </p:graphicFrame>
       <p:graphicFrame>
         <p:nvGraphicFramePr>
-          <p:cNvPr id="10017" name="ticklabelskip=2 (every other label)"/>
+          <p:cNvPr id="100017" name="ticklabelskip=2 (every other label)"/>
           <p:cNvGraphicFramePr/>
           <p:nvPr/>
         </p:nvGraphicFramePr>
@@ -4658,13 +4663,13 @@
         </p:xfrm>
         <a:graphic xmlns:a="http://schemas.openxmlformats.org/drawingml/2006/main">
           <a:graphicData uri="http://schemas.openxmlformats.org/drawingml/2006/chart">
-            <c:chart xmlns:r="http://schemas.openxmlformats.org/officeDocument/2006/relationships" xmlns:c="http://schemas.openxmlformats.org/drawingml/2006/chart" r:id="Rb3f772553fba4ae2"/>
+            <c:chart xmlns:r="http://schemas.openxmlformats.org/officeDocument/2006/relationships" xmlns:c="http://schemas.openxmlformats.org/drawingml/2006/chart" r:id="Rc115364f92ed48ba"/>
           </a:graphicData>
         </a:graphic>
       </p:graphicFrame>
       <p:graphicFrame>
         <p:nvGraphicFramePr>
-          <p:cNvPr id="10018" name="ticklabelskip=3"/>
+          <p:cNvPr id="100018" name="ticklabelskip=3"/>
           <p:cNvGraphicFramePr/>
           <p:nvPr/>
         </p:nvGraphicFramePr>
@@ -4674,7 +4679,7 @@
         </p:xfrm>
         <a:graphic xmlns:a="http://schemas.openxmlformats.org/drawingml/2006/main">
           <a:graphicData uri="http://schemas.openxmlformats.org/drawingml/2006/chart">
-            <c:chart xmlns:r="http://schemas.openxmlformats.org/officeDocument/2006/relationships" xmlns:c="http://schemas.openxmlformats.org/drawingml/2006/chart" r:id="Rfdd4a96596954656"/>
+            <c:chart xmlns:r="http://schemas.openxmlformats.org/officeDocument/2006/relationships" xmlns:c="http://schemas.openxmlformats.org/drawingml/2006/chart" r:id="R6e86019a4aa448f1"/>
           </a:graphicData>
         </a:graphic>
       </p:graphicFrame>
@@ -4695,8 +4700,8 @@
       <p:grpSpPr/>
       <p:sp>
         <p:nvSpPr>
-          <p:cNvPr id="10019" name="TextBox 1"/>
-          <p:cNvSpPr/>
+          <p:cNvPr id="100019" name="TextBox 1"/>
+          <p:cNvSpPr txBox="1"/>
           <p:nvPr/>
         </p:nvSpPr>
         <p:spPr>
@@ -4723,7 +4728,7 @@
       </p:sp>
       <p:graphicFrame>
         <p:nvGraphicFramePr>
-          <p:cNvPr id="10020" name="markersize=12 (standalone key)"/>
+          <p:cNvPr id="100020" name="markersize=12 (standalone key)"/>
           <p:cNvGraphicFramePr/>
           <p:nvPr/>
         </p:nvGraphicFramePr>
@@ -4733,13 +4738,13 @@
         </p:xfrm>
         <a:graphic xmlns:a="http://schemas.openxmlformats.org/drawingml/2006/main">
           <a:graphicData uri="http://schemas.openxmlformats.org/drawingml/2006/chart">
-            <c:chart xmlns:r="http://schemas.openxmlformats.org/officeDocument/2006/relationships" xmlns:c="http://schemas.openxmlformats.org/drawingml/2006/chart" r:id="Rde2a109c36da4a76"/>
+            <c:chart xmlns:r="http://schemas.openxmlformats.org/officeDocument/2006/relationships" xmlns:c="http://schemas.openxmlformats.org/drawingml/2006/chart" r:id="Rb00f2f2761354a4e"/>
           </a:graphicData>
         </a:graphic>
       </p:graphicFrame>
       <p:graphicFrame>
         <p:nvGraphicFramePr>
-          <p:cNvPr id="10021" name="areafill (applies to every series shape)"/>
+          <p:cNvPr id="100021" name="areafill (applies to every series shape)"/>
           <p:cNvGraphicFramePr/>
           <p:nvPr/>
         </p:nvGraphicFramePr>
@@ -4749,13 +4754,13 @@
         </p:xfrm>
         <a:graphic xmlns:a="http://schemas.openxmlformats.org/drawingml/2006/main">
           <a:graphicData uri="http://schemas.openxmlformats.org/drawingml/2006/chart">
-            <c:chart xmlns:r="http://schemas.openxmlformats.org/officeDocument/2006/relationships" xmlns:c="http://schemas.openxmlformats.org/drawingml/2006/chart" r:id="R47fb04db14314649"/>
+            <c:chart xmlns:r="http://schemas.openxmlformats.org/officeDocument/2006/relationships" xmlns:c="http://schemas.openxmlformats.org/drawingml/2006/chart" r:id="Rf502cabb66d24dc1"/>
           </a:graphicData>
         </a:graphic>
       </p:graphicFrame>
       <p:graphicFrame>
         <p:nvGraphicFramePr>
-          <p:cNvPr id="10022" name="chartFill=#FFF8E7 (chart-level fill)"/>
+          <p:cNvPr id="100022" name="chartFill=#FFF8E7 (chart-level fill)"/>
           <p:cNvGraphicFramePr/>
           <p:nvPr/>
         </p:nvGraphicFramePr>
@@ -4765,13 +4770,13 @@
         </p:xfrm>
         <a:graphic xmlns:a="http://schemas.openxmlformats.org/drawingml/2006/main">
           <a:graphicData uri="http://schemas.openxmlformats.org/drawingml/2006/chart">
-            <c:chart xmlns:r="http://schemas.openxmlformats.org/officeDocument/2006/relationships" xmlns:c="http://schemas.openxmlformats.org/drawingml/2006/chart" r:id="R34066d12e3b24890"/>
+            <c:chart xmlns:r="http://schemas.openxmlformats.org/officeDocument/2006/relationships" xmlns:c="http://schemas.openxmlformats.org/drawingml/2006/chart" r:id="R63e4e3bd68b341d9"/>
           </a:graphicData>
         </a:graphic>
       </p:graphicFrame>
       <p:graphicFrame>
         <p:nvGraphicFramePr>
-          <p:cNvPr id="10023" name="plotvisonly=true (skip hidden rows when bound to a sheet)"/>
+          <p:cNvPr id="100023" name="plotvisonly=true (skip hidden rows when bound to a sheet)"/>
           <p:cNvGraphicFramePr/>
           <p:nvPr/>
         </p:nvGraphicFramePr>
@@ -4781,7 +4786,7 @@
         </p:xfrm>
         <a:graphic xmlns:a="http://schemas.openxmlformats.org/drawingml/2006/main">
           <a:graphicData uri="http://schemas.openxmlformats.org/drawingml/2006/chart">
-            <c:chart xmlns:r="http://schemas.openxmlformats.org/officeDocument/2006/relationships" xmlns:c="http://schemas.openxmlformats.org/drawingml/2006/chart" r:id="Rb4d999feeeab4c98"/>
+            <c:chart xmlns:r="http://schemas.openxmlformats.org/officeDocument/2006/relationships" xmlns:c="http://schemas.openxmlformats.org/drawingml/2006/chart" r:id="Re9327a198ba24af8"/>
           </a:graphicData>
         </a:graphic>
       </p:graphicFrame>
@@ -4802,8 +4807,8 @@
       <p:grpSpPr/>
       <p:sp>
         <p:nvSpPr>
-          <p:cNvPr id="10024" name="TextBox 1"/>
-          <p:cNvSpPr/>
+          <p:cNvPr id="100024" name="TextBox 1"/>
+          <p:cNvSpPr txBox="1"/>
           <p:nvPr/>
         </p:nvSpPr>
         <p:spPr>
@@ -4830,7 +4835,7 @@
       </p:sp>
       <p:graphicFrame>
         <p:nvGraphicFramePr>
-          <p:cNvPr id="10025" name="style=2"/>
+          <p:cNvPr id="100025" name="style=2"/>
           <p:cNvGraphicFramePr/>
           <p:nvPr/>
         </p:nvGraphicFramePr>
@@ -4840,13 +4845,13 @@
         </p:xfrm>
         <a:graphic xmlns:a="http://schemas.openxmlformats.org/drawingml/2006/main">
           <a:graphicData uri="http://schemas.openxmlformats.org/drawingml/2006/chart">
-            <c:chart xmlns:r="http://schemas.openxmlformats.org/officeDocument/2006/relationships" xmlns:c="http://schemas.openxmlformats.org/drawingml/2006/chart" r:id="R209b82602e3343c3"/>
+            <c:chart xmlns:r="http://schemas.openxmlformats.org/officeDocument/2006/relationships" xmlns:c="http://schemas.openxmlformats.org/drawingml/2006/chart" r:id="Rbde41c1de5694e12"/>
           </a:graphicData>
         </a:graphic>
       </p:graphicFrame>
       <p:graphicFrame>
         <p:nvGraphicFramePr>
-          <p:cNvPr id="10026" name="style=42"/>
+          <p:cNvPr id="100026" name="style=42"/>
           <p:cNvGraphicFramePr/>
           <p:nvPr/>
         </p:nvGraphicFramePr>
@@ -4856,13 +4861,13 @@
         </p:xfrm>
         <a:graphic xmlns:a="http://schemas.openxmlformats.org/drawingml/2006/main">
           <a:graphicData uri="http://schemas.openxmlformats.org/drawingml/2006/chart">
-            <c:chart xmlns:r="http://schemas.openxmlformats.org/officeDocument/2006/relationships" xmlns:c="http://schemas.openxmlformats.org/drawingml/2006/chart" r:id="Rfd01852570ba45b8"/>
+            <c:chart xmlns:r="http://schemas.openxmlformats.org/officeDocument/2006/relationships" xmlns:c="http://schemas.openxmlformats.org/drawingml/2006/chart" r:id="R6ad50dbe15b24f14"/>
           </a:graphicData>
         </a:graphic>
       </p:graphicFrame>
       <p:graphicFrame>
         <p:nvGraphicFramePr>
-          <p:cNvPr id="10027" name="dispBlanksAs=gap (Set after Add)"/>
+          <p:cNvPr id="100027" name="dispBlanksAs=gap (Set after Add)"/>
           <p:cNvGraphicFramePr/>
           <p:nvPr/>
         </p:nvGraphicFramePr>
@@ -4872,13 +4877,13 @@
         </p:xfrm>
         <a:graphic xmlns:a="http://schemas.openxmlformats.org/drawingml/2006/main">
           <a:graphicData uri="http://schemas.openxmlformats.org/drawingml/2006/chart">
-            <c:chart xmlns:r="http://schemas.openxmlformats.org/officeDocument/2006/relationships" xmlns:c="http://schemas.openxmlformats.org/drawingml/2006/chart" r:id="Rd295f3138e1b400e"/>
+            <c:chart xmlns:r="http://schemas.openxmlformats.org/officeDocument/2006/relationships" xmlns:c="http://schemas.openxmlformats.org/drawingml/2006/chart" r:id="R6828ab5487164e93"/>
           </a:graphicData>
         </a:graphic>
       </p:graphicFrame>
       <p:graphicFrame>
         <p:nvGraphicFramePr>
-          <p:cNvPr id="10028" name="dataRange syntax demo (fallback inline)"/>
+          <p:cNvPr id="100028" name="dataRange syntax demo (fallback inline)"/>
           <p:cNvGraphicFramePr/>
           <p:nvPr/>
         </p:nvGraphicFramePr>
@@ -4888,7 +4893,7 @@
         </p:xfrm>
         <a:graphic xmlns:a="http://schemas.openxmlformats.org/drawingml/2006/main">
           <a:graphicData uri="http://schemas.openxmlformats.org/drawingml/2006/chart">
-            <c:chart xmlns:r="http://schemas.openxmlformats.org/officeDocument/2006/relationships" xmlns:c="http://schemas.openxmlformats.org/drawingml/2006/chart" r:id="R9b47499b4f834cf7"/>
+            <c:chart xmlns:r="http://schemas.openxmlformats.org/officeDocument/2006/relationships" xmlns:c="http://schemas.openxmlformats.org/drawingml/2006/chart" r:id="R7fae8ae83ba741a9"/>
           </a:graphicData>
         </a:graphic>
       </p:graphicFrame>
@@ -4909,8 +4914,8 @@
       <p:grpSpPr/>
       <p:sp>
         <p:nvSpPr>
-          <p:cNvPr id="10029" name="TextBox 1"/>
-          <p:cNvSpPr/>
+          <p:cNvPr id="100029" name="TextBox 1"/>
+          <p:cNvSpPr txBox="1"/>
           <p:nvPr/>
         </p:nvSpPr>
         <p:spPr>
@@ -4937,7 +4942,7 @@
       </p:sp>
       <p:graphicFrame>
         <p:nvGraphicFramePr>
-          <p:cNvPr id="10030" name="after: dispUnits=thousands (Set on value axis)"/>
+          <p:cNvPr id="100030" name="after: dispUnits=thousands (Set on value axis)"/>
           <p:cNvGraphicFramePr/>
           <p:nvPr/>
         </p:nvGraphicFramePr>
@@ -4947,13 +4952,13 @@
         </p:xfrm>
         <a:graphic xmlns:a="http://schemas.openxmlformats.org/drawingml/2006/main">
           <a:graphicData uri="http://schemas.openxmlformats.org/drawingml/2006/chart">
-            <c:chart xmlns:r="http://schemas.openxmlformats.org/officeDocument/2006/relationships" xmlns:c="http://schemas.openxmlformats.org/drawingml/2006/chart" r:id="Rbec08dfb682b4104"/>
+            <c:chart xmlns:r="http://schemas.openxmlformats.org/officeDocument/2006/relationships" xmlns:c="http://schemas.openxmlformats.org/drawingml/2006/chart" r:id="R95fafd1c2a9447d0"/>
           </a:graphicData>
         </a:graphic>
       </p:graphicFrame>
       <p:graphicFrame>
         <p:nvGraphicFramePr>
-          <p:cNvPr id="10031" name="after: logBase=10 (Set on value axis)"/>
+          <p:cNvPr id="100031" name="after: logBase=10 (Set on value axis)"/>
           <p:cNvGraphicFramePr/>
           <p:nvPr/>
         </p:nvGraphicFramePr>
@@ -4963,13 +4968,13 @@
         </p:xfrm>
         <a:graphic xmlns:a="http://schemas.openxmlformats.org/drawingml/2006/main">
           <a:graphicData uri="http://schemas.openxmlformats.org/drawingml/2006/chart">
-            <c:chart xmlns:r="http://schemas.openxmlformats.org/officeDocument/2006/relationships" xmlns:c="http://schemas.openxmlformats.org/drawingml/2006/chart" r:id="R535e4e43454b4958"/>
+            <c:chart xmlns:r="http://schemas.openxmlformats.org/officeDocument/2006/relationships" xmlns:c="http://schemas.openxmlformats.org/drawingml/2006/chart" r:id="R43bfd1091aa74206"/>
           </a:graphicData>
         </a:graphic>
       </p:graphicFrame>
       <p:graphicFrame>
         <p:nvGraphicFramePr>
-          <p:cNvPr id="10032" name="after: visible=false on value axis"/>
+          <p:cNvPr id="100032" name="after: visible=false on value axis"/>
           <p:cNvGraphicFramePr/>
           <p:nvPr/>
         </p:nvGraphicFramePr>
@@ -4979,13 +4984,13 @@
         </p:xfrm>
         <a:graphic xmlns:a="http://schemas.openxmlformats.org/drawingml/2006/main">
           <a:graphicData uri="http://schemas.openxmlformats.org/drawingml/2006/chart">
-            <c:chart xmlns:r="http://schemas.openxmlformats.org/officeDocument/2006/relationships" xmlns:c="http://schemas.openxmlformats.org/drawingml/2006/chart" r:id="R98a5aa105e0b4d4c"/>
+            <c:chart xmlns:r="http://schemas.openxmlformats.org/officeDocument/2006/relationships" xmlns:c="http://schemas.openxmlformats.org/drawingml/2006/chart" r:id="R202b18e3a1134834"/>
           </a:graphicData>
         </a:graphic>
       </p:graphicFrame>
       <p:graphicFrame>
         <p:nvGraphicFramePr>
-          <p:cNvPr id="10033" name="after: labelRotation=-45 on category axis"/>
+          <p:cNvPr id="100033" name="after: labelRotation=-45 on category axis"/>
           <p:cNvGraphicFramePr/>
           <p:nvPr/>
         </p:nvGraphicFramePr>
@@ -4995,7 +5000,7 @@
         </p:xfrm>
         <a:graphic xmlns:a="http://schemas.openxmlformats.org/drawingml/2006/main">
           <a:graphicData uri="http://schemas.openxmlformats.org/drawingml/2006/chart">
-            <c:chart xmlns:r="http://schemas.openxmlformats.org/officeDocument/2006/relationships" xmlns:c="http://schemas.openxmlformats.org/drawingml/2006/chart" r:id="R4bc31f71ccba4cf9"/>
+            <c:chart xmlns:r="http://schemas.openxmlformats.org/officeDocument/2006/relationships" xmlns:c="http://schemas.openxmlformats.org/drawingml/2006/chart" r:id="R6e2f8d80f6194cc8"/>
           </a:graphicData>
         </a:graphic>
       </p:graphicFrame>
@@ -5016,8 +5021,8 @@
       <p:grpSpPr/>
       <p:sp>
         <p:nvSpPr>
-          <p:cNvPr id="10034" name="TextBox 1"/>
-          <p:cNvSpPr/>
+          <p:cNvPr id="100034" name="TextBox 1"/>
+          <p:cNvSpPr txBox="1"/>
           <p:nvPr/>
         </p:nvSpPr>
         <p:spPr>
@@ -5044,7 +5049,7 @@
       </p:sp>
       <p:graphicFrame>
         <p:nvGraphicFramePr>
-          <p:cNvPr id="10035" name="before: A=60,90,140,180"/>
+          <p:cNvPr id="100035" name="before: A=60,90,140,180"/>
           <p:cNvGraphicFramePr/>
           <p:nvPr/>
         </p:nvGraphicFramePr>
@@ -5054,14 +5059,14 @@
         </p:xfrm>
         <a:graphic xmlns:a="http://schemas.openxmlformats.org/drawingml/2006/main">
           <a:graphicData uri="http://schemas.openxmlformats.org/drawingml/2006/chart">
-            <c:chart xmlns:r="http://schemas.openxmlformats.org/officeDocument/2006/relationships" xmlns:c="http://schemas.openxmlformats.org/drawingml/2006/chart" r:id="R22332d75624048f6"/>
+            <c:chart xmlns:r="http://schemas.openxmlformats.org/officeDocument/2006/relationships" xmlns:c="http://schemas.openxmlformats.org/drawingml/2006/chart" r:id="R974e881591d34880"/>
           </a:graphicData>
         </a:graphic>
       </p:graphicFrame>
       <p:sp>
         <p:nvSpPr>
-          <p:cNvPr id="10036" name="TextBox 2"/>
-          <p:cNvSpPr/>
+          <p:cNvPr id="100036" name="TextBox 2"/>
+          <p:cNvSpPr txBox="1"/>
           <p:nvPr/>
         </p:nvSpPr>
         <p:spPr>
@@ -5090,7 +5095,7 @@
       </p:sp>
       <p:graphicFrame>
         <p:nvGraphicFramePr>
-          <p:cNvPr id="10037" name="per-series categories= (range)"/>
+          <p:cNvPr id="100037" name="per-series categories= (range)"/>
           <p:cNvGraphicFramePr/>
           <p:nvPr/>
         </p:nvGraphicFramePr>
@@ -5100,14 +5105,14 @@
         </p:xfrm>
         <a:graphic xmlns:a="http://schemas.openxmlformats.org/drawingml/2006/main">
           <a:graphicData uri="http://schemas.openxmlformats.org/drawingml/2006/chart">
-            <c:chart xmlns:r="http://schemas.openxmlformats.org/officeDocument/2006/relationships" xmlns:c="http://schemas.openxmlformats.org/drawingml/2006/chart" r:id="R0082687fd8c54458"/>
+            <c:chart xmlns:r="http://schemas.openxmlformats.org/officeDocument/2006/relationships" xmlns:c="http://schemas.openxmlformats.org/drawingml/2006/chart" r:id="R49e28088dc37458f"/>
           </a:graphicData>
         </a:graphic>
       </p:graphicFrame>
       <p:sp>
         <p:nvSpPr>
-          <p:cNvPr id="10038" name="TextBox 3"/>
-          <p:cNvSpPr/>
+          <p:cNvPr id="100038" name="TextBox 3"/>
+          <p:cNvSpPr txBox="1"/>
           <p:nvPr/>
         </p:nvSpPr>
         <p:spPr>
@@ -5129,185 +5134,15 @@
                   <a:srgbClr val="222222"/>
                 </a:solidFill>
               </a:rPr>
-              <a:t>chart-series get --json (readback fields alpha/outlineColor/scatterStyle/...):</a:t>
-            </a:r>
-          </a:p>
-          <a:p xmlns:a="http://schemas.openxmlformats.org/drawingml/2006/main">
-            <a:r>
-              <a:rPr lang="en-US" sz="900">
-                <a:solidFill>
-                  <a:srgbClr val="222222"/>
-                </a:solidFill>
-              </a:rPr>
-              <a:t>{</a:t>
-            </a:r>
-          </a:p>
-          <a:p xmlns:a="http://schemas.openxmlformats.org/drawingml/2006/main">
-            <a:r>
-              <a:rPr lang="en-US" sz="900">
-                <a:solidFill>
-                  <a:srgbClr val="222222"/>
-                </a:solidFill>
-              </a:rPr>
-              <a:t>  "matches": 1,</a:t>
-            </a:r>
-          </a:p>
-          <a:p xmlns:a="http://schemas.openxmlformats.org/drawingml/2006/main">
-            <a:r>
-              <a:rPr lang="en-US" sz="900">
-                <a:solidFill>
-                  <a:srgbClr val="222222"/>
-                </a:solidFill>
-              </a:rPr>
-              <a:t>  "results": [</a:t>
-            </a:r>
-          </a:p>
-          <a:p xmlns:a="http://schemas.openxmlformats.org/drawingml/2006/main">
-            <a:r>
-              <a:rPr lang="en-US" sz="900">
-                <a:solidFill>
-                  <a:srgbClr val="222222"/>
-                </a:solidFill>
-              </a:rPr>
-              <a:t>    {</a:t>
-            </a:r>
-          </a:p>
-          <a:p xmlns:a="http://schemas.openxmlformats.org/drawingml/2006/main">
-            <a:r>
-              <a:rPr lang="en-US" sz="900">
-                <a:solidFill>
-                  <a:srgbClr val="222222"/>
-                </a:solidFill>
-              </a:rPr>
-              <a:t>      "path": "/slide[8]/chart[1]/series[1]",</a:t>
-            </a:r>
-          </a:p>
-          <a:p xmlns:a="http://schemas.openxmlformats.org/drawingml/2006/main">
-            <a:r>
-              <a:rPr lang="en-US" sz="900">
-                <a:solidFill>
-                  <a:srgbClr val="222222"/>
-                </a:solidFill>
-              </a:rPr>
-              <a:t>      "type": "series",</a:t>
-            </a:r>
-          </a:p>
-          <a:p xmlns:a="http://schemas.openxmlformats.org/drawingml/2006/main">
-            <a:r>
-              <a:rPr lang="en-US" sz="900">
-                <a:solidFill>
-                  <a:srgbClr val="222222"/>
-                </a:solidFill>
-              </a:rPr>
-              <a:t>      "text": "Readback Demo",</a:t>
-            </a:r>
-          </a:p>
-          <a:p xmlns:a="http://schemas.openxmlformats.org/drawingml/2006/main">
-            <a:r>
-              <a:rPr lang="en-US" sz="900">
-                <a:solidFill>
-                  <a:srgbClr val="222222"/>
-                </a:solidFill>
-              </a:rPr>
-              <a:t>      "childCount": 0,</a:t>
-            </a:r>
-          </a:p>
-          <a:p xmlns:a="http://schemas.openxmlformats.org/drawingml/2006/main">
-            <a:r>
-              <a:rPr lang="en-US" sz="900">
-                <a:solidFill>
-                  <a:srgbClr val="222222"/>
-                </a:solidFill>
-              </a:rPr>
-              <a:t>      "format": {</a:t>
-            </a:r>
-          </a:p>
-          <a:p xmlns:a="http://schemas.openxmlformats.org/drawingml/2006/main">
-            <a:r>
-              <a:rPr lang="en-US" sz="900">
-                <a:solidFill>
-                  <a:srgbClr val="222222"/>
-                </a:solidFill>
-              </a:rPr>
-              <a:t>        "name": "Readback Demo",</a:t>
-            </a:r>
-          </a:p>
-          <a:p xmlns:a="http://schemas.openxmlformats.org/drawingml/2006/main">
-            <a:r>
-              <a:rPr lang="en-US" sz="900">
-                <a:solidFill>
-                  <a:srgbClr val="222222"/>
-                </a:solidFill>
-              </a:rPr>
-              <a:t>        "values": "200,150,100,80",</a:t>
-            </a:r>
-          </a:p>
-          <a:p xmlns:a="http://schemas.openxmlformats.org/drawingml/2006/main">
-            <a:r>
-              <a:rPr lang="en-US" sz="900">
-                <a:solidFill>
-                  <a:srgbClr val="222222"/>
-                </a:solidFill>
-              </a:rPr>
-              <a:t>        "color": "#C00000"</a:t>
-            </a:r>
-          </a:p>
-          <a:p xmlns:a="http://schemas.openxmlformats.org/drawingml/2006/main">
-            <a:r>
-              <a:rPr lang="en-US" sz="900">
-                <a:solidFill>
-                  <a:srgbClr val="222222"/>
-                </a:solidFill>
-              </a:rPr>
-              <a:t>      },</a:t>
-            </a:r>
-          </a:p>
-          <a:p xmlns:a="http://schemas.openxmlformats.org/drawingml/2006/main">
-            <a:r>
-              <a:rPr lang="en-US" sz="900">
-                <a:solidFill>
-                  <a:srgbClr val="222222"/>
-                </a:solidFill>
-              </a:rPr>
-              <a:t>      "children": []</a:t>
-            </a:r>
-          </a:p>
-          <a:p xmlns:a="http://schemas.openxmlformats.org/drawingml/2006/main">
-            <a:r>
-              <a:rPr lang="en-US" sz="900">
-                <a:solidFill>
-                  <a:srgbClr val="222222"/>
-                </a:solidFill>
-              </a:rPr>
-              <a:t>    }</a:t>
-            </a:r>
-          </a:p>
-          <a:p xmlns:a="http://schemas.openxmlformats.org/drawingml/2006/main">
-            <a:r>
-              <a:rPr lang="en-US" sz="900">
-                <a:solidFill>
-                  <a:srgbClr val="222222"/>
-                </a:solidFill>
-              </a:rPr>
-              <a:t>  ]</a:t>
-            </a:r>
-          </a:p>
-          <a:p xmlns:a="http://schemas.openxmlformats.org/drawingml/2006/main">
-            <a:r>
-              <a:rPr lang="en-US" sz="900">
-                <a:solidFill>
-                  <a:srgbClr val="222222"/>
-                </a:solidFill>
-              </a:rPr>
-              <a:t>}</a:t>
+              <a:t>chart-series get --json: readback fields alpha/outlineColor/scatterStyle/...</a:t>
             </a:r>
           </a:p>
         </p:txBody>
       </p:sp>
       <p:sp>
         <p:nvSpPr>
-          <p:cNvPr id="10039" name="TextBox 4"/>
-          <p:cNvSpPr/>
+          <p:cNvPr id="100039" name="TextBox 4"/>
+          <p:cNvSpPr txBox="1"/>
           <p:nvPr/>
         </p:nvSpPr>
         <p:spPr>
@@ -5329,207 +5164,7 @@
                   <a:srgbClr val="222222"/>
                 </a:solidFill>
               </a:rPr>
-              <a:t>chart-axis get --json (readback axisFont/axisMax/axisMin/axisNumFmt/axisOrientation/axisTitle/labelOffset/tickLabelSkip):</a:t>
-            </a:r>
-          </a:p>
-          <a:p xmlns:a="http://schemas.openxmlformats.org/drawingml/2006/main">
-            <a:r>
-              <a:rPr lang="en-US" sz="900">
-                <a:solidFill>
-                  <a:srgbClr val="222222"/>
-                </a:solidFill>
-              </a:rPr>
-              <a:t>{</a:t>
-            </a:r>
-          </a:p>
-          <a:p xmlns:a="http://schemas.openxmlformats.org/drawingml/2006/main">
-            <a:r>
-              <a:rPr lang="en-US" sz="900">
-                <a:solidFill>
-                  <a:srgbClr val="222222"/>
-                </a:solidFill>
-              </a:rPr>
-              <a:t>  "matches": 1,</a:t>
-            </a:r>
-          </a:p>
-          <a:p xmlns:a="http://schemas.openxmlformats.org/drawingml/2006/main">
-            <a:r>
-              <a:rPr lang="en-US" sz="900">
-                <a:solidFill>
-                  <a:srgbClr val="222222"/>
-                </a:solidFill>
-              </a:rPr>
-              <a:t>  "results": [</a:t>
-            </a:r>
-          </a:p>
-          <a:p xmlns:a="http://schemas.openxmlformats.org/drawingml/2006/main">
-            <a:r>
-              <a:rPr lang="en-US" sz="900">
-                <a:solidFill>
-                  <a:srgbClr val="222222"/>
-                </a:solidFill>
-              </a:rPr>
-              <a:t>    {</a:t>
-            </a:r>
-          </a:p>
-          <a:p xmlns:a="http://schemas.openxmlformats.org/drawingml/2006/main">
-            <a:r>
-              <a:rPr lang="en-US" sz="900">
-                <a:solidFill>
-                  <a:srgbClr val="222222"/>
-                </a:solidFill>
-              </a:rPr>
-              <a:t>      "path": "/slide[8]/chart[1]/axis[@role=value]",</a:t>
-            </a:r>
-          </a:p>
-          <a:p xmlns:a="http://schemas.openxmlformats.org/drawingml/2006/main">
-            <a:r>
-              <a:rPr lang="en-US" sz="900">
-                <a:solidFill>
-                  <a:srgbClr val="222222"/>
-                </a:solidFill>
-              </a:rPr>
-              <a:t>      "type": "axis",</a:t>
-            </a:r>
-          </a:p>
-          <a:p xmlns:a="http://schemas.openxmlformats.org/drawingml/2006/main">
-            <a:r>
-              <a:rPr lang="en-US" sz="900">
-                <a:solidFill>
-                  <a:srgbClr val="222222"/>
-                </a:solidFill>
-              </a:rPr>
-              <a:t>      "childCount": 0,</a:t>
-            </a:r>
-          </a:p>
-          <a:p xmlns:a="http://schemas.openxmlformats.org/drawingml/2006/main">
-            <a:r>
-              <a:rPr lang="en-US" sz="900">
-                <a:solidFill>
-                  <a:srgbClr val="222222"/>
-                </a:solidFill>
-              </a:rPr>
-              <a:t>      "format": {</a:t>
-            </a:r>
-          </a:p>
-          <a:p xmlns:a="http://schemas.openxmlformats.org/drawingml/2006/main">
-            <a:r>
-              <a:rPr lang="en-US" sz="900">
-                <a:solidFill>
-                  <a:srgbClr val="222222"/>
-                </a:solidFill>
-              </a:rPr>
-              <a:t>        "role": "value",</a:t>
-            </a:r>
-          </a:p>
-          <a:p xmlns:a="http://schemas.openxmlformats.org/drawingml/2006/main">
-            <a:r>
-              <a:rPr lang="en-US" sz="900">
-                <a:solidFill>
-                  <a:srgbClr val="222222"/>
-                </a:solidFill>
-              </a:rPr>
-              <a:t>        "title": "Readback Y",</a:t>
-            </a:r>
-          </a:p>
-          <a:p xmlns:a="http://schemas.openxmlformats.org/drawingml/2006/main">
-            <a:r>
-              <a:rPr lang="en-US" sz="900">
-                <a:solidFill>
-                  <a:srgbClr val="222222"/>
-                </a:solidFill>
-              </a:rPr>
-              <a:t>        "visible": "true",</a:t>
-            </a:r>
-          </a:p>
-          <a:p xmlns:a="http://schemas.openxmlformats.org/drawingml/2006/main">
-            <a:r>
-              <a:rPr lang="en-US" sz="900">
-                <a:solidFill>
-                  <a:srgbClr val="222222"/>
-                </a:solidFill>
-              </a:rPr>
-              <a:t>        "min": "0",</a:t>
-            </a:r>
-          </a:p>
-          <a:p xmlns:a="http://schemas.openxmlformats.org/drawingml/2006/main">
-            <a:r>
-              <a:rPr lang="en-US" sz="900">
-                <a:solidFill>
-                  <a:srgbClr val="222222"/>
-                </a:solidFill>
-              </a:rPr>
-              <a:t>        "max": "300",</a:t>
-            </a:r>
-          </a:p>
-          <a:p xmlns:a="http://schemas.openxmlformats.org/drawingml/2006/main">
-            <a:r>
-              <a:rPr lang="en-US" sz="900">
-                <a:solidFill>
-                  <a:srgbClr val="222222"/>
-                </a:solidFill>
-              </a:rPr>
-              <a:t>        "majorUnit": "75",</a:t>
-            </a:r>
-          </a:p>
-          <a:p xmlns:a="http://schemas.openxmlformats.org/drawingml/2006/main">
-            <a:r>
-              <a:rPr lang="en-US" sz="900">
-                <a:solidFill>
-                  <a:srgbClr val="222222"/>
-                </a:solidFill>
-              </a:rPr>
-              <a:t>        "format": "$#,##0",</a:t>
-            </a:r>
-          </a:p>
-          <a:p xmlns:a="http://schemas.openxmlformats.org/drawingml/2006/main">
-            <a:r>
-              <a:rPr lang="en-US" sz="900">
-                <a:solidFill>
-                  <a:srgbClr val="222222"/>
-                </a:solidFill>
-              </a:rPr>
-              <a:t>        "majorGridlines": "true",</a:t>
-            </a:r>
-          </a:p>
-          <a:p xmlns:a="http://schemas.openxmlformats.org/drawingml/2006/main">
-            <a:r>
-              <a:rPr lang="en-US" sz="900">
-                <a:solidFill>
-                  <a:srgbClr val="222222"/>
-                </a:solidFill>
-              </a:rPr>
-              <a:t>        "minorGridlines": "false",</a:t>
-            </a:r>
-          </a:p>
-          <a:p xmlns:a="http://schemas.openxmlformats.org/drawingml/2006/main">
-            <a:r>
-              <a:rPr lang="en-US" sz="900">
-                <a:solidFill>
-                  <a:srgbClr val="222222"/>
-                </a:solidFill>
-              </a:rPr>
-              <a:t>        "majorTickMark": "out",</a:t>
-            </a:r>
-          </a:p>
-          <a:p xmlns:a="http://schemas.openxmlformats.org/drawingml/2006/main">
-            <a:r>
-              <a:rPr lang="en-US" sz="900">
-                <a:solidFill>
-                  <a:srgbClr val="222222"/>
-                </a:solidFill>
-              </a:rPr>
-              <a:t>        "minorTickMark": "none",</a:t>
-            </a:r>
-          </a:p>
-          <a:p xmlns:a="http://schemas.openxmlformats.org/drawingml/2006/main">
-            <a:r>
-              <a:rPr lang="en-US" sz="900">
-                <a:solidFill>
-                  <a:srgbClr val="222222"/>
-                </a:solidFill>
-              </a:rPr>
-              <a:t>        "tickLabelPos": "nextT</a:t>
+              <a:t>chart-axis get --json: readback axisFont/axisMax/axisMin/axisNumFmt/axisOrientation/axisTitle/labelOffset/tickLabelSkip</a:t>
             </a:r>
           </a:p>
         </p:txBody>
